--- a/docs/Diapositivas_NOCTILUZ.pptx
+++ b/docs/Diapositivas_NOCTILUZ.pptx
@@ -507,7 +507,7 @@
           <a:p>
             <a:r>
               <a:rPr lang="en-US" dirty="0"/>
-              <a:t>Presentar el caso en 30-40 s: qué vende NOCTILUZ, los tres criterios del catálogo y por qué el modo es una regla de negocio (no todas las prendas lo admiten). Decir quién ha hecho qué (debe coincidir con los commits). Cada integrante debe hablar un tiempo parecido: unos 1 min 45 s por persona.</a:t>
+              <a:t>Habla: Luis (diapositivas 1 y 2, ≈1:45). Guion completo en docs/Guion_defensa.md. Presentar el caso en 30-40 s: qué vende NOCTILUZ, los tres criterios del catálogo y por qué el modo es una regla de negocio (no todas las prendas lo admiten). Decir quién ha hecho qué (debe coincidir con los commits). Cada integrante debe hablar un tiempo parecido.</a:t>
             </a:r>
             <a:endParaRPr lang="en-US" dirty="0"/>
           </a:p>
@@ -683,7 +683,7 @@
           <a:p>
             <a:r>
               <a:rPr lang="en-US" dirty="0"/>
-              <a:t>Hacer la demo en la URL pública, no en local. Tener abiertas dos pestañas: tienda y back-office. Tras cada paso, refrescar la pestaña Eventos del back-office para enseñar que el evento aparece. Plan B si falla la red: vídeo corto grabado de antemano.</a:t>
+              <a:t>Hablan: Roberto (pasos 1-2, ≈0:45), Javier (pasos 3-5, ≈1:15) y JunJie (pasos 6-7, ≈0:45). Hacer la demo en la URL pública, no en local. Tener abiertas dos pestañas: tienda y back-office. Tras cada paso, refrescar la pestaña Eventos del back-office para enseñar que el evento aparece. Plan B si falla la red: vídeo corto grabado de antemano.</a:t>
             </a:r>
             <a:endParaRPr lang="en-US" dirty="0"/>
           </a:p>
@@ -771,7 +771,7 @@
           <a:p>
             <a:r>
               <a:rPr lang="en-US" dirty="0"/>
-              <a:t>Enseñar en phpMyAdmin las tablas pedidos, lineas_pedido, pagos, historial_estados y eventos con el pedido de la demo. Descargar el CSV de eventos. Explicar cómo lo consumiría otro sistema en la Tarea 2: pide GET eventos.php?desde_id=N y guarda el último id leído.</a:t>
+              <a:t>Habla: JunJie (≈0:45). Enseñar en phpMyAdmin las tablas pedidos, lineas_pedido, pagos, historial_estados y eventos con el pedido de la demo. Descargar el CSV de eventos. Explicar cómo lo consumiría otro sistema en la Tarea 2: pide GET eventos.php?desde_id=N y guarda el último id leído.</a:t>
             </a:r>
             <a:endParaRPr lang="en-US" dirty="0"/>
           </a:p>
@@ -859,7 +859,7 @@
           <a:p>
             <a:r>
               <a:rPr lang="en-US" dirty="0"/>
-              <a:t>Ser honestos con el uso de IA: qué hizo la IA, qué errores se le detectaron y cómo se validó. Preparar la respuesta a "¿por qué no WooCommerce?" y "¿qué pasa si dos personas compran la última unidad a la vez?" (UPDATE … WHERE stock &gt;= cantidad dentro de la transacción).</a:t>
+              <a:t>Habla: Luis (diapositivas 5 y 6, ≈1:15). Ser honestos con el uso de IA: qué hizo la IA, qué errores se le detectaron y cómo se validó. Preparar la respuesta a "¿por qué no WooCommerce?" y "¿qué pasa si dos personas compran la última unidad a la vez?" (UPDATE … WHERE stock &gt;= cantidad dentro de la transacción).</a:t>
             </a:r>
             <a:endParaRPr lang="en-US" dirty="0"/>
           </a:p>
@@ -2773,7 +2773,7 @@
                 <a:ea typeface="Segoe UI" pitchFamily="34" charset="-122"/>
                 <a:cs typeface="Segoe UI" pitchFamily="34" charset="-120"/>
               </a:rPr>
-              <a:t>Hosting DonDominio (Apache + PHP + MySQL) · el navegador nunca decide precios, impuestos ni stock</a:t>
+              <a:t>Hosting InfinityFree, provisional (Apache + PHP + MySQL) · el navegador nunca decide precios, impuestos ni stock</a:t>
             </a:r>
             <a:endParaRPr lang="en-US" sz="1300" dirty="0"/>
           </a:p>
@@ -4821,7 +4821,7 @@
                 <a:ea typeface="Segoe UI" pitchFamily="34" charset="-122"/>
                 <a:cs typeface="Segoe UI" pitchFamily="34" charset="-120"/>
               </a:rPr>
-              <a:t>URL: [COMPLETAR] · Back-office: /admin.html · admin@noctiluz.test</a:t>
+              <a:t>URL: https://algo.free.je · Back-office: /admin.html · admin@noctiluz.test</a:t>
             </a:r>
             <a:endParaRPr lang="en-US" sz="1200" dirty="0"/>
           </a:p>
@@ -5067,7 +5067,7 @@
       </p:sp>
       <p:pic>
         <p:nvPicPr>
-          <p:cNvPr id="8" name="Image 0" descr="C:\Users\FX517\AppData\Local\Temp\claude\C--Users-FX517-Documents-Smash\2079b400-4ed9-47a4-b7ee-87d689724b5f\scratchpad\docs\modelo_datos.png">    </p:cNvPr>
+          <p:cNvPr id="8" name="Image 0" descr="C:/Users/FX517/Documents/Trabajo de clase/Tarea 1 SDE/entrega_final/docs/modelo_datos.png">    </p:cNvPr>
           <p:cNvPicPr>
             <a:picLocks noChangeAspect="1"/>
           </p:cNvPicPr>

--- a/docs/Diapositivas_NOCTILUZ.pptx
+++ b/docs/Diapositivas_NOCTILUZ.pptx
@@ -1344,6 +1344,10 @@
             <a:prstDash val="solid"/>
           </a:ln>
         </p:spPr>
+        <p:txBody>
+          <a:bodyPr/>
+          <a:p/>
+        </p:txBody>
       </p:sp>
       <p:sp>
         <p:nvSpPr>
@@ -1564,6 +1568,10 @@
             <a:prstDash val="solid"/>
           </a:ln>
         </p:spPr>
+        <p:txBody>
+          <a:bodyPr/>
+          <a:p/>
+        </p:txBody>
       </p:sp>
       <p:sp>
         <p:nvSpPr>
@@ -1589,6 +1597,10 @@
             <a:prstDash val="solid"/>
           </a:ln>
         </p:spPr>
+        <p:txBody>
+          <a:bodyPr/>
+          <a:p/>
+        </p:txBody>
       </p:sp>
       <p:sp>
         <p:nvSpPr>
@@ -1708,7 +1720,7 @@
                 <a:ea typeface="Segoe UI" pitchFamily="34" charset="-122"/>
                 <a:cs typeface="Segoe UI" pitchFamily="34" charset="-120"/>
               </a:rPr>
-              <a:t>8 modelos · 16 variantes · cada modelo admite solo ciertos modos</a:t>
+              <a:t>16 productos · 16 variantes · cada producto admite un solo modo</a:t>
             </a:r>
             <a:endParaRPr lang="en-US" sz="1300" dirty="0"/>
           </a:p>
@@ -1759,6 +1771,10 @@
             <a:prstDash val="solid"/>
           </a:ln>
         </p:spPr>
+        <p:txBody>
+          <a:bodyPr/>
+          <a:p/>
+        </p:txBody>
       </p:sp>
       <p:sp>
         <p:nvSpPr>
@@ -1784,6 +1800,10 @@
             <a:prstDash val="solid"/>
           </a:ln>
         </p:spPr>
+        <p:txBody>
+          <a:bodyPr/>
+          <a:p/>
+        </p:txBody>
       </p:sp>
       <p:sp>
         <p:nvSpPr>
@@ -1861,7 +1881,7 @@
                 <a:ea typeface="Segoe UI" pitchFamily="34" charset="-122"/>
                 <a:cs typeface="Segoe UI" pitchFamily="34" charset="-120"/>
               </a:rPr>
-              <a:t>Luis Galindo Buendia — [COMPLETAR]</a:t>
+              <a:t>Luis Galindo Buendia — Despliegue, memoria y diapositivas</a:t>
             </a:r>
             <a:endParaRPr lang="en-US" sz="1400" dirty="0"/>
           </a:p>
@@ -1882,7 +1902,7 @@
                 <a:ea typeface="Segoe UI" pitchFamily="34" charset="-122"/>
                 <a:cs typeface="Segoe UI" pitchFamily="34" charset="-120"/>
               </a:rPr>
-              <a:t>Roberto Ciller Miñana — [COMPLETAR]</a:t>
+              <a:t>Roberto Ciller Miñana — HTML inicial (ChatGPT) y fotos</a:t>
             </a:r>
             <a:endParaRPr lang="en-US" sz="1400" dirty="0"/>
           </a:p>
@@ -1903,7 +1923,7 @@
                 <a:ea typeface="Segoe UI" pitchFamily="34" charset="-122"/>
                 <a:cs typeface="Segoe UI" pitchFamily="34" charset="-120"/>
               </a:rPr>
-              <a:t>Javier Zamora Lopez — [COMPLETAR]</a:t>
+              <a:t>Javier Zamora Lopez — Pruebas automáticas y catálogo</a:t>
             </a:r>
             <a:endParaRPr lang="en-US" sz="1400" dirty="0"/>
           </a:p>
@@ -1924,7 +1944,7 @@
                 <a:ea typeface="Segoe UI" pitchFamily="34" charset="-122"/>
                 <a:cs typeface="Segoe UI" pitchFamily="34" charset="-120"/>
               </a:rPr>
-              <a:t>JunJie Yang Jao — [COMPLETAR]</a:t>
+              <a:t>JunJie Yang Jao — Back-office y diseño</a:t>
             </a:r>
             <a:endParaRPr lang="en-US" sz="1400" dirty="0"/>
           </a:p>
@@ -1986,6 +2006,10 @@
             <a:prstDash val="solid"/>
           </a:ln>
         </p:spPr>
+        <p:txBody>
+          <a:bodyPr/>
+          <a:p/>
+        </p:txBody>
       </p:sp>
       <p:sp>
         <p:nvSpPr>
@@ -2167,6 +2191,10 @@
             <a:prstDash val="solid"/>
           </a:ln>
         </p:spPr>
+        <p:txBody>
+          <a:bodyPr/>
+          <a:p/>
+        </p:txBody>
       </p:sp>
       <p:sp>
         <p:nvSpPr>
@@ -2326,6 +2354,10 @@
             <a:prstDash val="solid"/>
           </a:ln>
         </p:spPr>
+        <p:txBody>
+          <a:bodyPr/>
+          <a:p/>
+        </p:txBody>
       </p:sp>
       <p:sp>
         <p:nvSpPr>
@@ -2485,6 +2517,10 @@
             <a:prstDash val="solid"/>
           </a:ln>
         </p:spPr>
+        <p:txBody>
+          <a:bodyPr/>
+          <a:p/>
+        </p:txBody>
       </p:sp>
       <p:sp>
         <p:nvSpPr>
@@ -2644,6 +2680,10 @@
             <a:prstDash val="solid"/>
           </a:ln>
         </p:spPr>
+        <p:txBody>
+          <a:bodyPr/>
+          <a:p/>
+        </p:txBody>
       </p:sp>
       <p:sp>
         <p:nvSpPr>
@@ -2805,6 +2845,10 @@
             <a:prstDash val="solid"/>
           </a:ln>
         </p:spPr>
+        <p:txBody>
+          <a:bodyPr/>
+          <a:p/>
+        </p:txBody>
       </p:sp>
       <p:sp>
         <p:nvSpPr>
@@ -2910,6 +2954,10 @@
             <a:prstDash val="solid"/>
           </a:ln>
         </p:spPr>
+        <p:txBody>
+          <a:bodyPr/>
+          <a:p/>
+        </p:txBody>
       </p:sp>
       <p:sp>
         <p:nvSpPr>
@@ -3015,6 +3063,10 @@
             <a:prstDash val="solid"/>
           </a:ln>
         </p:spPr>
+        <p:txBody>
+          <a:bodyPr/>
+          <a:p/>
+        </p:txBody>
       </p:sp>
       <p:sp>
         <p:nvSpPr>
@@ -3120,6 +3172,10 @@
             <a:prstDash val="solid"/>
           </a:ln>
         </p:spPr>
+        <p:txBody>
+          <a:bodyPr/>
+          <a:p/>
+        </p:txBody>
       </p:sp>
       <p:sp>
         <p:nvSpPr>
@@ -3225,6 +3281,10 @@
             <a:prstDash val="solid"/>
           </a:ln>
         </p:spPr>
+        <p:txBody>
+          <a:bodyPr/>
+          <a:p/>
+        </p:txBody>
       </p:sp>
       <p:sp>
         <p:nvSpPr>
@@ -3330,6 +3390,10 @@
             <a:prstDash val="solid"/>
           </a:ln>
         </p:spPr>
+        <p:txBody>
+          <a:bodyPr/>
+          <a:p/>
+        </p:txBody>
       </p:sp>
       <p:sp>
         <p:nvSpPr>
@@ -3435,6 +3499,10 @@
             <a:prstDash val="solid"/>
           </a:ln>
         </p:spPr>
+        <p:txBody>
+          <a:bodyPr/>
+          <a:p/>
+        </p:txBody>
       </p:sp>
       <p:sp>
         <p:nvSpPr>
@@ -3637,6 +3705,10 @@
             <a:prstDash val="solid"/>
           </a:ln>
         </p:spPr>
+        <p:txBody>
+          <a:bodyPr/>
+          <a:p/>
+        </p:txBody>
       </p:sp>
       <p:sp>
         <p:nvSpPr>
@@ -3818,6 +3890,10 @@
             <a:prstDash val="solid"/>
           </a:ln>
         </p:spPr>
+        <p:txBody>
+          <a:bodyPr/>
+          <a:p/>
+        </p:txBody>
       </p:sp>
       <p:sp>
         <p:nvSpPr>
@@ -3960,6 +4036,10 @@
             <a:prstDash val="solid"/>
           </a:ln>
         </p:spPr>
+        <p:txBody>
+          <a:bodyPr/>
+          <a:p/>
+        </p:txBody>
       </p:sp>
       <p:sp>
         <p:nvSpPr>
@@ -4102,6 +4182,10 @@
             <a:prstDash val="solid"/>
           </a:ln>
         </p:spPr>
+        <p:txBody>
+          <a:bodyPr/>
+          <a:p/>
+        </p:txBody>
       </p:sp>
       <p:sp>
         <p:nvSpPr>
@@ -4244,6 +4328,10 @@
             <a:prstDash val="solid"/>
           </a:ln>
         </p:spPr>
+        <p:txBody>
+          <a:bodyPr/>
+          <a:p/>
+        </p:txBody>
       </p:sp>
       <p:sp>
         <p:nvSpPr>
@@ -4386,6 +4474,10 @@
             <a:prstDash val="solid"/>
           </a:ln>
         </p:spPr>
+        <p:txBody>
+          <a:bodyPr/>
+          <a:p/>
+        </p:txBody>
       </p:sp>
       <p:sp>
         <p:nvSpPr>
@@ -4528,6 +4620,10 @@
             <a:prstDash val="solid"/>
           </a:ln>
         </p:spPr>
+        <p:txBody>
+          <a:bodyPr/>
+          <a:p/>
+        </p:txBody>
       </p:sp>
       <p:sp>
         <p:nvSpPr>
@@ -4670,6 +4766,10 @@
             <a:prstDash val="solid"/>
           </a:ln>
         </p:spPr>
+        <p:txBody>
+          <a:bodyPr/>
+          <a:p/>
+        </p:txBody>
       </p:sp>
       <p:sp>
         <p:nvSpPr>
@@ -4883,6 +4983,10 @@
             <a:prstDash val="solid"/>
           </a:ln>
         </p:spPr>
+        <p:txBody>
+          <a:bodyPr/>
+          <a:p/>
+        </p:txBody>
       </p:sp>
       <p:sp>
         <p:nvSpPr>
@@ -5064,6 +5168,10 @@
             <a:prstDash val="solid"/>
           </a:ln>
         </p:spPr>
+        <p:txBody>
+          <a:bodyPr/>
+          <a:p/>
+        </p:txBody>
       </p:sp>
       <p:pic>
         <p:nvPicPr>
@@ -5152,6 +5260,10 @@
             <a:prstDash val="solid"/>
           </a:ln>
         </p:spPr>
+        <p:txBody>
+          <a:bodyPr/>
+          <a:p/>
+        </p:txBody>
       </p:sp>
       <p:sp>
         <p:nvSpPr>
@@ -5177,6 +5289,10 @@
             <a:prstDash val="solid"/>
           </a:ln>
         </p:spPr>
+        <p:txBody>
+          <a:bodyPr/>
+          <a:p/>
+        </p:txBody>
       </p:sp>
       <p:sp>
         <p:nvSpPr>
@@ -5305,6 +5421,10 @@
             <a:prstDash val="solid"/>
           </a:ln>
         </p:spPr>
+        <p:txBody>
+          <a:bodyPr/>
+          <a:p/>
+        </p:txBody>
       </p:sp>
       <p:sp>
         <p:nvSpPr>
@@ -5330,6 +5450,10 @@
             <a:prstDash val="solid"/>
           </a:ln>
         </p:spPr>
+        <p:txBody>
+          <a:bodyPr/>
+          <a:p/>
+        </p:txBody>
       </p:sp>
       <p:sp>
         <p:nvSpPr>
@@ -5458,6 +5582,10 @@
             <a:prstDash val="solid"/>
           </a:ln>
         </p:spPr>
+        <p:txBody>
+          <a:bodyPr/>
+          <a:p/>
+        </p:txBody>
       </p:sp>
       <p:sp>
         <p:nvSpPr>
@@ -5483,6 +5611,10 @@
             <a:prstDash val="solid"/>
           </a:ln>
         </p:spPr>
+        <p:txBody>
+          <a:bodyPr/>
+          <a:p/>
+        </p:txBody>
       </p:sp>
       <p:sp>
         <p:nvSpPr>
@@ -5622,6 +5754,10 @@
             <a:prstDash val="solid"/>
           </a:ln>
         </p:spPr>
+        <p:txBody>
+          <a:bodyPr/>
+          <a:p/>
+        </p:txBody>
       </p:sp>
       <p:sp>
         <p:nvSpPr>
@@ -5803,6 +5939,10 @@
             <a:prstDash val="solid"/>
           </a:ln>
         </p:spPr>
+        <p:txBody>
+          <a:bodyPr/>
+          <a:p/>
+        </p:txBody>
       </p:sp>
       <p:sp>
         <p:nvSpPr>
@@ -5828,6 +5968,10 @@
             <a:prstDash val="solid"/>
           </a:ln>
         </p:spPr>
+        <p:txBody>
+          <a:bodyPr/>
+          <a:p/>
+        </p:txBody>
       </p:sp>
       <p:sp>
         <p:nvSpPr>
@@ -5998,6 +6142,10 @@
             <a:prstDash val="solid"/>
           </a:ln>
         </p:spPr>
+        <p:txBody>
+          <a:bodyPr/>
+          <a:p/>
+        </p:txBody>
       </p:sp>
       <p:sp>
         <p:nvSpPr>
@@ -6023,6 +6171,10 @@
             <a:prstDash val="solid"/>
           </a:ln>
         </p:spPr>
+        <p:txBody>
+          <a:bodyPr/>
+          <a:p/>
+        </p:txBody>
       </p:sp>
       <p:sp>
         <p:nvSpPr>
@@ -6184,7 +6336,7 @@
                 <a:ea typeface="Segoe UI" pitchFamily="34" charset="-122"/>
                 <a:cs typeface="Segoe UI" pitchFamily="34" charset="-120"/>
               </a:rPr>
-              <a:t>8 variantes con imagen provisional</a:t>
+              <a:t>Fotos de baja resolución</a:t>
             </a:r>
             <a:endParaRPr lang="en-US" sz="1200" dirty="0"/>
           </a:p>
@@ -6214,6 +6366,10 @@
             <a:prstDash val="solid"/>
           </a:ln>
         </p:spPr>
+        <p:txBody>
+          <a:bodyPr/>
+          <a:p/>
+        </p:txBody>
       </p:sp>
       <p:sp>
         <p:nvSpPr>
@@ -6239,6 +6395,10 @@
             <a:prstDash val="solid"/>
           </a:ln>
         </p:spPr>
+        <p:txBody>
+          <a:bodyPr/>
+          <a:p/>
+        </p:txBody>
       </p:sp>
       <p:sp>
         <p:nvSpPr>
@@ -6316,7 +6476,7 @@
                 <a:ea typeface="Segoe UI" pitchFamily="34" charset="-122"/>
                 <a:cs typeface="Segoe UI" pitchFamily="34" charset="-120"/>
               </a:rPr>
-              <a:t>Versión inicial del HTML generada con IA</a:t>
+              <a:t>Versión inicial del HTML generada con ChatGPT</a:t>
             </a:r>
             <a:endParaRPr lang="en-US" sz="1200" dirty="0"/>
           </a:p>
@@ -6400,7 +6560,7 @@
                 <a:ea typeface="Segoe UI" pitchFamily="34" charset="-122"/>
                 <a:cs typeface="Segoe UI" pitchFamily="34" charset="-120"/>
               </a:rPr>
-              <a:t>[COMPLETAR: reflexión crítica del grupo]</a:t>
+              <a:t>Reflexión: la IA comete errores y exige validación humana (filtro de modos, importes en el hosting, alojamiento sin PHP)</a:t>
             </a:r>
             <a:endParaRPr lang="en-US" sz="1200" dirty="0"/>
           </a:p>
@@ -6462,6 +6622,10 @@
             <a:prstDash val="solid"/>
           </a:ln>
         </p:spPr>
+        <p:txBody>
+          <a:bodyPr/>
+          <a:p/>
+        </p:txBody>
       </p:sp>
       <p:sp>
         <p:nvSpPr>
@@ -6713,13 +6877,13 @@
             <a:r>
               <a:rPr lang="en-US" sz="2000" dirty="0">
                 <a:solidFill>
-                  <a:srgbClr val="F3B36B"/>
-                </a:solidFill>
-                <a:latin typeface="Segoe UI" pitchFamily="34" charset="0"/>
-                <a:ea typeface="Segoe UI" pitchFamily="34" charset="-122"/>
-                <a:cs typeface="Segoe UI" pitchFamily="34" charset="-120"/>
-              </a:rPr>
-              <a:t>[COMPLETAR: aprendizaje principal del grupo]</a:t>
+                  <a:srgbClr val="F3F2EF"/>
+                </a:solidFill>
+                <a:latin typeface="Segoe UI" pitchFamily="34" charset="0"/>
+                <a:ea typeface="Segoe UI" pitchFamily="34" charset="-122"/>
+                <a:cs typeface="Segoe UI" pitchFamily="34" charset="-120"/>
+              </a:rPr>
+              <a:t>Aprendizaje principal: un canal de venta se diseña pensando en quién consumirá los datos después.</a:t>
             </a:r>
             <a:endParaRPr lang="en-US" sz="2000" dirty="0"/>
           </a:p>

--- a/docs/Diapositivas_NOCTILUZ.pptx
+++ b/docs/Diapositivas_NOCTILUZ.pptx
@@ -2813,7 +2813,7 @@
                 <a:ea typeface="Segoe UI" pitchFamily="34" charset="-122"/>
                 <a:cs typeface="Segoe UI" pitchFamily="34" charset="-120"/>
               </a:rPr>
-              <a:t>Hosting InfinityFree, provisional (Apache + PHP + MySQL) · el navegador nunca decide precios, impuestos ni stock</a:t>
+              <a:t>Hosting InfinityFree (Apache + PHP + MySQL) · el navegador nunca decide precios, impuestos ni stock</a:t>
             </a:r>
             <a:endParaRPr lang="en-US" sz="1300" dirty="0"/>
           </a:p>
@@ -3967,7 +3967,7 @@
                 <a:ea typeface="Segoe UI" pitchFamily="34" charset="-122"/>
                 <a:cs typeface="Segoe UI" pitchFamily="34" charset="-120"/>
               </a:rPr>
-              <a:t>Filtrar: chaquetas + luz violeta + modo degradado</a:t>
+              <a:t>Filtrar: chaquetas + luz violeta + modo fijo</a:t>
             </a:r>
             <a:endParaRPr lang="en-US" sz="1500" dirty="0"/>
           </a:p>
@@ -4113,7 +4113,7 @@
                 <a:ea typeface="Segoe UI" pitchFamily="34" charset="-122"/>
                 <a:cs typeface="Segoe UI" pitchFamily="34" charset="-120"/>
               </a:rPr>
-              <a:t>Ficha: elegir modo y talla, añadir al carrito</a:t>
+              <a:t>Ficha: elegir talla, añadir al carrito</a:t>
             </a:r>
             <a:endParaRPr lang="en-US" sz="1500" dirty="0"/>
           </a:p>
@@ -4921,7 +4921,7 @@
                 <a:ea typeface="Segoe UI" pitchFamily="34" charset="-122"/>
                 <a:cs typeface="Segoe UI" pitchFamily="34" charset="-120"/>
               </a:rPr>
-              <a:t>URL: https://algo.free.je · Back-office: /admin.html · admin@noctiluz.test</a:t>
+              <a:t>URL: https://noctiluz.free.je · Back-office: /admin.html · admin@noctiluz.test</a:t>
             </a:r>
             <a:endParaRPr lang="en-US" sz="1200" dirty="0"/>
           </a:p>

--- a/docs/Diapositivas_NOCTILUZ.pptx
+++ b/docs/Diapositivas_NOCTILUZ.pptx
@@ -2813,7 +2813,7 @@
                 <a:ea typeface="Segoe UI" pitchFamily="34" charset="-122"/>
                 <a:cs typeface="Segoe UI" pitchFamily="34" charset="-120"/>
               </a:rPr>
-              <a:t>Hosting InfinityFree (Apache + PHP + MySQL) · el navegador nunca decide precios, impuestos ni stock</a:t>
+              <a:t>Hosting InfinityFree, provisional (Apache + PHP + MySQL) · el navegador nunca decide precios, impuestos ni stock</a:t>
             </a:r>
             <a:endParaRPr lang="en-US" sz="1300" dirty="0"/>
           </a:p>
@@ -3967,7 +3967,7 @@
                 <a:ea typeface="Segoe UI" pitchFamily="34" charset="-122"/>
                 <a:cs typeface="Segoe UI" pitchFamily="34" charset="-120"/>
               </a:rPr>
-              <a:t>Filtrar: chaquetas + luz violeta + modo fijo</a:t>
+              <a:t>Filtrar: chaquetas + luz violeta + modo degradado</a:t>
             </a:r>
             <a:endParaRPr lang="en-US" sz="1500" dirty="0"/>
           </a:p>
@@ -4113,7 +4113,7 @@
                 <a:ea typeface="Segoe UI" pitchFamily="34" charset="-122"/>
                 <a:cs typeface="Segoe UI" pitchFamily="34" charset="-120"/>
               </a:rPr>
-              <a:t>Ficha: elegir talla, añadir al carrito</a:t>
+              <a:t>Ficha: elegir modo y talla, añadir al carrito</a:t>
             </a:r>
             <a:endParaRPr lang="en-US" sz="1500" dirty="0"/>
           </a:p>
